--- a/PPT-figure/网络结构.pptx
+++ b/PPT-figure/网络结构.pptx
@@ -104,6 +104,11 @@
       </a:defRPr>
     </a:lvl9pPr>
   </p:defaultTextStyle>
+  <p:extLst>
+    <p:ext uri="{EFAFB233-063F-42B5-8137-9DF3F51BA10A}">
+      <p15:sldGuideLst xmlns:p15="http://schemas.microsoft.com/office/powerpoint/2012/main"/>
+    </p:ext>
+  </p:extLst>
 </p:presentation>
 </file>
 
@@ -238,7 +243,7 @@
           <a:p>
             <a:fld id="{85C2FB89-5765-47F2-8749-02A9FA3E6D91}" type="datetimeFigureOut">
               <a:rPr lang="zh-CN" altLang="en-US" smtClean="0"/>
-              <a:t>2026/4/21</a:t>
+              <a:t>2026/4/22</a:t>
             </a:fld>
             <a:endParaRPr lang="zh-CN" altLang="en-US"/>
           </a:p>
@@ -408,7 +413,7 @@
           <a:p>
             <a:fld id="{85C2FB89-5765-47F2-8749-02A9FA3E6D91}" type="datetimeFigureOut">
               <a:rPr lang="zh-CN" altLang="en-US" smtClean="0"/>
-              <a:t>2026/4/21</a:t>
+              <a:t>2026/4/22</a:t>
             </a:fld>
             <a:endParaRPr lang="zh-CN" altLang="en-US"/>
           </a:p>
@@ -588,7 +593,7 @@
           <a:p>
             <a:fld id="{85C2FB89-5765-47F2-8749-02A9FA3E6D91}" type="datetimeFigureOut">
               <a:rPr lang="zh-CN" altLang="en-US" smtClean="0"/>
-              <a:t>2026/4/21</a:t>
+              <a:t>2026/4/22</a:t>
             </a:fld>
             <a:endParaRPr lang="zh-CN" altLang="en-US"/>
           </a:p>
@@ -758,7 +763,7 @@
           <a:p>
             <a:fld id="{85C2FB89-5765-47F2-8749-02A9FA3E6D91}" type="datetimeFigureOut">
               <a:rPr lang="zh-CN" altLang="en-US" smtClean="0"/>
-              <a:t>2026/4/21</a:t>
+              <a:t>2026/4/22</a:t>
             </a:fld>
             <a:endParaRPr lang="zh-CN" altLang="en-US"/>
           </a:p>
@@ -1004,7 +1009,7 @@
           <a:p>
             <a:fld id="{85C2FB89-5765-47F2-8749-02A9FA3E6D91}" type="datetimeFigureOut">
               <a:rPr lang="zh-CN" altLang="en-US" smtClean="0"/>
-              <a:t>2026/4/21</a:t>
+              <a:t>2026/4/22</a:t>
             </a:fld>
             <a:endParaRPr lang="zh-CN" altLang="en-US"/>
           </a:p>
@@ -1236,7 +1241,7 @@
           <a:p>
             <a:fld id="{85C2FB89-5765-47F2-8749-02A9FA3E6D91}" type="datetimeFigureOut">
               <a:rPr lang="zh-CN" altLang="en-US" smtClean="0"/>
-              <a:t>2026/4/21</a:t>
+              <a:t>2026/4/22</a:t>
             </a:fld>
             <a:endParaRPr lang="zh-CN" altLang="en-US"/>
           </a:p>
@@ -1603,7 +1608,7 @@
           <a:p>
             <a:fld id="{85C2FB89-5765-47F2-8749-02A9FA3E6D91}" type="datetimeFigureOut">
               <a:rPr lang="zh-CN" altLang="en-US" smtClean="0"/>
-              <a:t>2026/4/21</a:t>
+              <a:t>2026/4/22</a:t>
             </a:fld>
             <a:endParaRPr lang="zh-CN" altLang="en-US"/>
           </a:p>
@@ -1721,7 +1726,7 @@
           <a:p>
             <a:fld id="{85C2FB89-5765-47F2-8749-02A9FA3E6D91}" type="datetimeFigureOut">
               <a:rPr lang="zh-CN" altLang="en-US" smtClean="0"/>
-              <a:t>2026/4/21</a:t>
+              <a:t>2026/4/22</a:t>
             </a:fld>
             <a:endParaRPr lang="zh-CN" altLang="en-US"/>
           </a:p>
@@ -1816,7 +1821,7 @@
           <a:p>
             <a:fld id="{85C2FB89-5765-47F2-8749-02A9FA3E6D91}" type="datetimeFigureOut">
               <a:rPr lang="zh-CN" altLang="en-US" smtClean="0"/>
-              <a:t>2026/4/21</a:t>
+              <a:t>2026/4/22</a:t>
             </a:fld>
             <a:endParaRPr lang="zh-CN" altLang="en-US"/>
           </a:p>
@@ -2093,7 +2098,7 @@
           <a:p>
             <a:fld id="{85C2FB89-5765-47F2-8749-02A9FA3E6D91}" type="datetimeFigureOut">
               <a:rPr lang="zh-CN" altLang="en-US" smtClean="0"/>
-              <a:t>2026/4/21</a:t>
+              <a:t>2026/4/22</a:t>
             </a:fld>
             <a:endParaRPr lang="zh-CN" altLang="en-US"/>
           </a:p>
@@ -2346,7 +2351,7 @@
           <a:p>
             <a:fld id="{85C2FB89-5765-47F2-8749-02A9FA3E6D91}" type="datetimeFigureOut">
               <a:rPr lang="zh-CN" altLang="en-US" smtClean="0"/>
-              <a:t>2026/4/21</a:t>
+              <a:t>2026/4/22</a:t>
             </a:fld>
             <a:endParaRPr lang="zh-CN" altLang="en-US"/>
           </a:p>
@@ -2559,7 +2564,7 @@
           <a:p>
             <a:fld id="{85C2FB89-5765-47F2-8749-02A9FA3E6D91}" type="datetimeFigureOut">
               <a:rPr lang="zh-CN" altLang="en-US" smtClean="0"/>
-              <a:t>2026/4/21</a:t>
+              <a:t>2026/4/22</a:t>
             </a:fld>
             <a:endParaRPr lang="zh-CN" altLang="en-US"/>
           </a:p>
@@ -2972,7 +2977,7 @@
         </p:nvGrpSpPr>
         <p:grpSpPr>
           <a:xfrm>
-            <a:off x="3329187" y="1835239"/>
+            <a:off x="998111" y="2234484"/>
             <a:ext cx="2196317" cy="2182970"/>
             <a:chOff x="3329187" y="1835239"/>
             <a:chExt cx="2196317" cy="2182970"/>
@@ -3663,6 +3668,1473 @@
             <a:xfrm flipV="1">
               <a:off x="3709114" y="3578494"/>
               <a:ext cx="1208467" cy="249752"/>
+            </a:xfrm>
+            <a:prstGeom prst="straightConnector1">
+              <a:avLst/>
+            </a:prstGeom>
+            <a:ln>
+              <a:tailEnd type="triangle"/>
+            </a:ln>
+          </p:spPr>
+          <p:style>
+            <a:lnRef idx="1">
+              <a:schemeClr val="accent1"/>
+            </a:lnRef>
+            <a:fillRef idx="0">
+              <a:schemeClr val="accent1"/>
+            </a:fillRef>
+            <a:effectRef idx="0">
+              <a:schemeClr val="accent1"/>
+            </a:effectRef>
+            <a:fontRef idx="minor">
+              <a:schemeClr val="tx1"/>
+            </a:fontRef>
+          </p:style>
+        </p:cxnSp>
+      </p:grpSp>
+      <p:grpSp>
+        <p:nvGrpSpPr>
+          <p:cNvPr id="104" name="组合 103"/>
+          <p:cNvGrpSpPr/>
+          <p:nvPr/>
+        </p:nvGrpSpPr>
+        <p:grpSpPr>
+          <a:xfrm>
+            <a:off x="6078827" y="2234484"/>
+            <a:ext cx="3274124" cy="2182970"/>
+            <a:chOff x="6078827" y="2234484"/>
+            <a:chExt cx="3274124" cy="2182970"/>
+          </a:xfrm>
+        </p:grpSpPr>
+        <p:sp>
+          <p:nvSpPr>
+            <p:cNvPr id="22" name="椭圆 21"/>
+            <p:cNvSpPr/>
+            <p:nvPr/>
+          </p:nvSpPr>
+          <p:spPr>
+            <a:xfrm>
+              <a:off x="6085268" y="2234484"/>
+              <a:ext cx="379927" cy="379927"/>
+            </a:xfrm>
+            <a:prstGeom prst="ellipse">
+              <a:avLst/>
+            </a:prstGeom>
+          </p:spPr>
+          <p:style>
+            <a:lnRef idx="2">
+              <a:schemeClr val="accent1">
+                <a:shade val="50000"/>
+              </a:schemeClr>
+            </a:lnRef>
+            <a:fillRef idx="1">
+              <a:schemeClr val="accent1"/>
+            </a:fillRef>
+            <a:effectRef idx="0">
+              <a:schemeClr val="accent1"/>
+            </a:effectRef>
+            <a:fontRef idx="minor">
+              <a:schemeClr val="lt1"/>
+            </a:fontRef>
+          </p:style>
+          <p:txBody>
+            <a:bodyPr vert="horz" rtlCol="0" anchor="ctr"/>
+            <a:lstStyle/>
+            <a:p>
+              <a:pPr algn="ctr"/>
+              <a:endParaRPr lang="zh-CN" altLang="en-US" sz="900" dirty="0"/>
+            </a:p>
+          </p:txBody>
+        </p:sp>
+        <p:sp>
+          <p:nvSpPr>
+            <p:cNvPr id="24" name="椭圆 23"/>
+            <p:cNvSpPr/>
+            <p:nvPr/>
+          </p:nvSpPr>
+          <p:spPr>
+            <a:xfrm>
+              <a:off x="6078828" y="2852669"/>
+              <a:ext cx="379927" cy="379927"/>
+            </a:xfrm>
+            <a:prstGeom prst="ellipse">
+              <a:avLst/>
+            </a:prstGeom>
+          </p:spPr>
+          <p:style>
+            <a:lnRef idx="2">
+              <a:schemeClr val="accent1">
+                <a:shade val="50000"/>
+              </a:schemeClr>
+            </a:lnRef>
+            <a:fillRef idx="1">
+              <a:schemeClr val="accent1"/>
+            </a:fillRef>
+            <a:effectRef idx="0">
+              <a:schemeClr val="accent1"/>
+            </a:effectRef>
+            <a:fontRef idx="minor">
+              <a:schemeClr val="lt1"/>
+            </a:fontRef>
+          </p:style>
+          <p:txBody>
+            <a:bodyPr rtlCol="0" anchor="ctr"/>
+            <a:lstStyle/>
+            <a:p>
+              <a:pPr algn="ctr"/>
+              <a:endParaRPr lang="zh-CN" altLang="en-US"/>
+            </a:p>
+          </p:txBody>
+        </p:sp>
+        <p:sp>
+          <p:nvSpPr>
+            <p:cNvPr id="26" name="椭圆 25"/>
+            <p:cNvSpPr/>
+            <p:nvPr/>
+          </p:nvSpPr>
+          <p:spPr>
+            <a:xfrm>
+              <a:off x="6078827" y="4037527"/>
+              <a:ext cx="379927" cy="379927"/>
+            </a:xfrm>
+            <a:prstGeom prst="ellipse">
+              <a:avLst/>
+            </a:prstGeom>
+          </p:spPr>
+          <p:style>
+            <a:lnRef idx="2">
+              <a:schemeClr val="accent1">
+                <a:shade val="50000"/>
+              </a:schemeClr>
+            </a:lnRef>
+            <a:fillRef idx="1">
+              <a:schemeClr val="accent1"/>
+            </a:fillRef>
+            <a:effectRef idx="0">
+              <a:schemeClr val="accent1"/>
+            </a:effectRef>
+            <a:fontRef idx="minor">
+              <a:schemeClr val="lt1"/>
+            </a:fontRef>
+          </p:style>
+          <p:txBody>
+            <a:bodyPr rtlCol="0" anchor="ctr"/>
+            <a:lstStyle/>
+            <a:p>
+              <a:pPr algn="ctr"/>
+              <a:endParaRPr lang="zh-CN" altLang="en-US"/>
+            </a:p>
+          </p:txBody>
+        </p:sp>
+        <p:sp>
+          <p:nvSpPr>
+            <p:cNvPr id="28" name="文本框 27"/>
+            <p:cNvSpPr txBox="1"/>
+            <p:nvPr/>
+          </p:nvSpPr>
+          <p:spPr>
+            <a:xfrm rot="5400000">
+              <a:off x="6167378" y="3353940"/>
+              <a:ext cx="453970" cy="584775"/>
+            </a:xfrm>
+            <a:prstGeom prst="rect">
+              <a:avLst/>
+            </a:prstGeom>
+            <a:noFill/>
+          </p:spPr>
+          <p:txBody>
+            <a:bodyPr vert="horz" wrap="none" rtlCol="0" anchor="t">
+              <a:spAutoFit/>
+            </a:bodyPr>
+            <a:lstStyle/>
+            <a:p>
+              <a:pPr algn="ctr"/>
+              <a:r>
+                <a:rPr lang="en-US" altLang="zh-CN" sz="3200" dirty="0" smtClean="0"/>
+                <a:t>...</a:t>
+              </a:r>
+              <a:endParaRPr lang="zh-CN" altLang="en-US" sz="3200" dirty="0"/>
+            </a:p>
+          </p:txBody>
+        </p:sp>
+        <p:sp>
+          <p:nvSpPr>
+            <p:cNvPr id="30" name="文本框 29"/>
+            <p:cNvSpPr txBox="1"/>
+            <p:nvPr/>
+          </p:nvSpPr>
+          <p:spPr>
+            <a:xfrm>
+              <a:off x="6129197" y="2297488"/>
+              <a:ext cx="292068" cy="253916"/>
+            </a:xfrm>
+            <a:prstGeom prst="rect">
+              <a:avLst/>
+            </a:prstGeom>
+            <a:noFill/>
+          </p:spPr>
+          <p:txBody>
+            <a:bodyPr vert="horz" wrap="none" rtlCol="0">
+              <a:spAutoFit/>
+            </a:bodyPr>
+            <a:lstStyle/>
+            <a:p>
+              <a:r>
+                <a:rPr lang="en-US" altLang="zh-CN" sz="1050" dirty="0" smtClean="0">
+                  <a:solidFill>
+                    <a:schemeClr val="bg1"/>
+                  </a:solidFill>
+                </a:rPr>
+                <a:t>x</a:t>
+              </a:r>
+              <a:r>
+                <a:rPr lang="en-US" altLang="zh-CN" sz="1050" baseline="-25000" dirty="0" smtClean="0">
+                  <a:solidFill>
+                    <a:schemeClr val="bg1"/>
+                  </a:solidFill>
+                </a:rPr>
+                <a:t>1</a:t>
+              </a:r>
+              <a:endParaRPr lang="zh-CN" altLang="en-US" sz="1050" baseline="-25000" dirty="0">
+                <a:solidFill>
+                  <a:schemeClr val="bg1"/>
+                </a:solidFill>
+              </a:endParaRPr>
+            </a:p>
+          </p:txBody>
+        </p:sp>
+        <p:sp>
+          <p:nvSpPr>
+            <p:cNvPr id="32" name="文本框 31"/>
+            <p:cNvSpPr txBox="1"/>
+            <p:nvPr/>
+          </p:nvSpPr>
+          <p:spPr>
+            <a:xfrm>
+              <a:off x="6128048" y="2915674"/>
+              <a:ext cx="292068" cy="253916"/>
+            </a:xfrm>
+            <a:prstGeom prst="rect">
+              <a:avLst/>
+            </a:prstGeom>
+            <a:noFill/>
+          </p:spPr>
+          <p:txBody>
+            <a:bodyPr vert="horz" wrap="none" rtlCol="0">
+              <a:spAutoFit/>
+            </a:bodyPr>
+            <a:lstStyle/>
+            <a:p>
+              <a:r>
+                <a:rPr lang="en-US" altLang="zh-CN" sz="1050" dirty="0" smtClean="0">
+                  <a:solidFill>
+                    <a:schemeClr val="bg1"/>
+                  </a:solidFill>
+                </a:rPr>
+                <a:t>x</a:t>
+              </a:r>
+              <a:r>
+                <a:rPr lang="en-US" altLang="zh-CN" sz="1050" baseline="-25000" dirty="0">
+                  <a:solidFill>
+                    <a:schemeClr val="bg1"/>
+                  </a:solidFill>
+                </a:rPr>
+                <a:t>2</a:t>
+              </a:r>
+              <a:endParaRPr lang="zh-CN" altLang="en-US" sz="1050" baseline="-25000" dirty="0">
+                <a:solidFill>
+                  <a:schemeClr val="bg1"/>
+                </a:solidFill>
+              </a:endParaRPr>
+            </a:p>
+          </p:txBody>
+        </p:sp>
+        <p:sp>
+          <p:nvSpPr>
+            <p:cNvPr id="35" name="文本框 34"/>
+            <p:cNvSpPr txBox="1"/>
+            <p:nvPr/>
+          </p:nvSpPr>
+          <p:spPr>
+            <a:xfrm>
+              <a:off x="6122756" y="4100532"/>
+              <a:ext cx="293670" cy="253916"/>
+            </a:xfrm>
+            <a:prstGeom prst="rect">
+              <a:avLst/>
+            </a:prstGeom>
+            <a:noFill/>
+          </p:spPr>
+          <p:txBody>
+            <a:bodyPr vert="horz" wrap="none" rtlCol="0">
+              <a:spAutoFit/>
+            </a:bodyPr>
+            <a:lstStyle/>
+            <a:p>
+              <a:r>
+                <a:rPr lang="en-US" altLang="zh-CN" sz="1050" dirty="0" smtClean="0">
+                  <a:solidFill>
+                    <a:schemeClr val="bg1"/>
+                  </a:solidFill>
+                </a:rPr>
+                <a:t>x</a:t>
+              </a:r>
+              <a:r>
+                <a:rPr lang="en-US" altLang="zh-CN" sz="1050" baseline="-25000" dirty="0" smtClean="0">
+                  <a:solidFill>
+                    <a:schemeClr val="bg1"/>
+                  </a:solidFill>
+                </a:rPr>
+                <a:t>n</a:t>
+              </a:r>
+              <a:endParaRPr lang="zh-CN" altLang="en-US" sz="1050" baseline="-25000" dirty="0">
+                <a:solidFill>
+                  <a:schemeClr val="bg1"/>
+                </a:solidFill>
+              </a:endParaRPr>
+            </a:p>
+          </p:txBody>
+        </p:sp>
+        <p:sp>
+          <p:nvSpPr>
+            <p:cNvPr id="36" name="椭圆 35"/>
+            <p:cNvSpPr/>
+            <p:nvPr/>
+          </p:nvSpPr>
+          <p:spPr>
+            <a:xfrm>
+              <a:off x="8745029" y="2602917"/>
+              <a:ext cx="379927" cy="379927"/>
+            </a:xfrm>
+            <a:prstGeom prst="ellipse">
+              <a:avLst/>
+            </a:prstGeom>
+          </p:spPr>
+          <p:style>
+            <a:lnRef idx="2">
+              <a:schemeClr val="accent1">
+                <a:shade val="50000"/>
+              </a:schemeClr>
+            </a:lnRef>
+            <a:fillRef idx="1">
+              <a:schemeClr val="accent1"/>
+            </a:fillRef>
+            <a:effectRef idx="0">
+              <a:schemeClr val="accent1"/>
+            </a:effectRef>
+            <a:fontRef idx="minor">
+              <a:schemeClr val="lt1"/>
+            </a:fontRef>
+          </p:style>
+          <p:txBody>
+            <a:bodyPr rtlCol="0" anchor="ctr"/>
+            <a:lstStyle/>
+            <a:p>
+              <a:pPr algn="ctr"/>
+              <a:endParaRPr lang="zh-CN" altLang="en-US"/>
+            </a:p>
+          </p:txBody>
+        </p:sp>
+        <p:sp>
+          <p:nvSpPr>
+            <p:cNvPr id="37" name="椭圆 36"/>
+            <p:cNvSpPr/>
+            <p:nvPr/>
+          </p:nvSpPr>
+          <p:spPr>
+            <a:xfrm>
+              <a:off x="8745028" y="3787775"/>
+              <a:ext cx="379927" cy="379927"/>
+            </a:xfrm>
+            <a:prstGeom prst="ellipse">
+              <a:avLst/>
+            </a:prstGeom>
+          </p:spPr>
+          <p:style>
+            <a:lnRef idx="2">
+              <a:schemeClr val="accent1">
+                <a:shade val="50000"/>
+              </a:schemeClr>
+            </a:lnRef>
+            <a:fillRef idx="1">
+              <a:schemeClr val="accent1"/>
+            </a:fillRef>
+            <a:effectRef idx="0">
+              <a:schemeClr val="accent1"/>
+            </a:effectRef>
+            <a:fontRef idx="minor">
+              <a:schemeClr val="lt1"/>
+            </a:fontRef>
+          </p:style>
+          <p:txBody>
+            <a:bodyPr rtlCol="0" anchor="ctr"/>
+            <a:lstStyle/>
+            <a:p>
+              <a:pPr algn="ctr"/>
+              <a:endParaRPr lang="zh-CN" altLang="en-US"/>
+            </a:p>
+          </p:txBody>
+        </p:sp>
+        <p:sp>
+          <p:nvSpPr>
+            <p:cNvPr id="38" name="文本框 37"/>
+            <p:cNvSpPr txBox="1"/>
+            <p:nvPr/>
+          </p:nvSpPr>
+          <p:spPr>
+            <a:xfrm rot="5400000">
+              <a:off x="8833579" y="3104188"/>
+              <a:ext cx="453970" cy="584775"/>
+            </a:xfrm>
+            <a:prstGeom prst="rect">
+              <a:avLst/>
+            </a:prstGeom>
+            <a:noFill/>
+          </p:spPr>
+          <p:txBody>
+            <a:bodyPr vert="horz" wrap="none" rtlCol="0" anchor="t">
+              <a:spAutoFit/>
+            </a:bodyPr>
+            <a:lstStyle/>
+            <a:p>
+              <a:pPr algn="ctr"/>
+              <a:r>
+                <a:rPr lang="en-US" altLang="zh-CN" sz="3200" dirty="0" smtClean="0"/>
+                <a:t>...</a:t>
+              </a:r>
+              <a:endParaRPr lang="zh-CN" altLang="en-US" sz="3200" dirty="0"/>
+            </a:p>
+          </p:txBody>
+        </p:sp>
+        <p:sp>
+          <p:nvSpPr>
+            <p:cNvPr id="39" name="文本框 38"/>
+            <p:cNvSpPr txBox="1"/>
+            <p:nvPr/>
+          </p:nvSpPr>
+          <p:spPr>
+            <a:xfrm>
+              <a:off x="8794249" y="2665922"/>
+              <a:ext cx="295274" cy="253916"/>
+            </a:xfrm>
+            <a:prstGeom prst="rect">
+              <a:avLst/>
+            </a:prstGeom>
+            <a:noFill/>
+          </p:spPr>
+          <p:txBody>
+            <a:bodyPr vert="horz" wrap="none" rtlCol="0">
+              <a:spAutoFit/>
+            </a:bodyPr>
+            <a:lstStyle/>
+            <a:p>
+              <a:r>
+                <a:rPr lang="en-US" altLang="zh-CN" sz="1050" dirty="0" smtClean="0">
+                  <a:solidFill>
+                    <a:schemeClr val="bg1"/>
+                  </a:solidFill>
+                </a:rPr>
+                <a:t>y</a:t>
+              </a:r>
+              <a:r>
+                <a:rPr lang="en-US" altLang="zh-CN" sz="1050" baseline="-25000" dirty="0">
+                  <a:solidFill>
+                    <a:schemeClr val="bg1"/>
+                  </a:solidFill>
+                </a:rPr>
+                <a:t>1</a:t>
+              </a:r>
+              <a:endParaRPr lang="zh-CN" altLang="en-US" sz="1050" baseline="-25000" dirty="0">
+                <a:solidFill>
+                  <a:schemeClr val="bg1"/>
+                </a:solidFill>
+              </a:endParaRPr>
+            </a:p>
+          </p:txBody>
+        </p:sp>
+        <p:sp>
+          <p:nvSpPr>
+            <p:cNvPr id="40" name="文本框 39"/>
+            <p:cNvSpPr txBox="1"/>
+            <p:nvPr/>
+          </p:nvSpPr>
+          <p:spPr>
+            <a:xfrm>
+              <a:off x="8788957" y="3850780"/>
+              <a:ext cx="322524" cy="253916"/>
+            </a:xfrm>
+            <a:prstGeom prst="rect">
+              <a:avLst/>
+            </a:prstGeom>
+            <a:noFill/>
+          </p:spPr>
+          <p:txBody>
+            <a:bodyPr vert="horz" wrap="none" rtlCol="0">
+              <a:spAutoFit/>
+            </a:bodyPr>
+            <a:lstStyle/>
+            <a:p>
+              <a:r>
+                <a:rPr lang="en-US" altLang="zh-CN" sz="1050" dirty="0" smtClean="0">
+                  <a:solidFill>
+                    <a:schemeClr val="bg1"/>
+                  </a:solidFill>
+                </a:rPr>
+                <a:t>y</a:t>
+              </a:r>
+              <a:r>
+                <a:rPr lang="en-US" altLang="zh-CN" sz="1050" baseline="-25000" dirty="0">
+                  <a:solidFill>
+                    <a:schemeClr val="bg1"/>
+                  </a:solidFill>
+                </a:rPr>
+                <a:t>m</a:t>
+              </a:r>
+              <a:endParaRPr lang="zh-CN" altLang="en-US" sz="1050" baseline="-25000" dirty="0">
+                <a:solidFill>
+                  <a:schemeClr val="bg1"/>
+                </a:solidFill>
+              </a:endParaRPr>
+            </a:p>
+          </p:txBody>
+        </p:sp>
+        <p:sp>
+          <p:nvSpPr>
+            <p:cNvPr id="47" name="椭圆 46"/>
+            <p:cNvSpPr/>
+            <p:nvPr/>
+          </p:nvSpPr>
+          <p:spPr>
+            <a:xfrm>
+              <a:off x="7065738" y="2234484"/>
+              <a:ext cx="379927" cy="379927"/>
+            </a:xfrm>
+            <a:prstGeom prst="ellipse">
+              <a:avLst/>
+            </a:prstGeom>
+          </p:spPr>
+          <p:style>
+            <a:lnRef idx="2">
+              <a:schemeClr val="accent1">
+                <a:shade val="50000"/>
+              </a:schemeClr>
+            </a:lnRef>
+            <a:fillRef idx="1">
+              <a:schemeClr val="accent1"/>
+            </a:fillRef>
+            <a:effectRef idx="0">
+              <a:schemeClr val="accent1"/>
+            </a:effectRef>
+            <a:fontRef idx="minor">
+              <a:schemeClr val="lt1"/>
+            </a:fontRef>
+          </p:style>
+          <p:txBody>
+            <a:bodyPr vert="horz" rtlCol="0" anchor="ctr"/>
+            <a:lstStyle/>
+            <a:p>
+              <a:pPr algn="ctr"/>
+              <a:endParaRPr lang="zh-CN" altLang="en-US" sz="900" dirty="0"/>
+            </a:p>
+          </p:txBody>
+        </p:sp>
+        <p:sp>
+          <p:nvSpPr>
+            <p:cNvPr id="48" name="椭圆 47"/>
+            <p:cNvSpPr/>
+            <p:nvPr/>
+          </p:nvSpPr>
+          <p:spPr>
+            <a:xfrm>
+              <a:off x="7059298" y="2852669"/>
+              <a:ext cx="379927" cy="379927"/>
+            </a:xfrm>
+            <a:prstGeom prst="ellipse">
+              <a:avLst/>
+            </a:prstGeom>
+          </p:spPr>
+          <p:style>
+            <a:lnRef idx="2">
+              <a:schemeClr val="accent1">
+                <a:shade val="50000"/>
+              </a:schemeClr>
+            </a:lnRef>
+            <a:fillRef idx="1">
+              <a:schemeClr val="accent1"/>
+            </a:fillRef>
+            <a:effectRef idx="0">
+              <a:schemeClr val="accent1"/>
+            </a:effectRef>
+            <a:fontRef idx="minor">
+              <a:schemeClr val="lt1"/>
+            </a:fontRef>
+          </p:style>
+          <p:txBody>
+            <a:bodyPr rtlCol="0" anchor="ctr"/>
+            <a:lstStyle/>
+            <a:p>
+              <a:pPr algn="ctr"/>
+              <a:endParaRPr lang="zh-CN" altLang="en-US"/>
+            </a:p>
+          </p:txBody>
+        </p:sp>
+        <p:sp>
+          <p:nvSpPr>
+            <p:cNvPr id="49" name="椭圆 48"/>
+            <p:cNvSpPr/>
+            <p:nvPr/>
+          </p:nvSpPr>
+          <p:spPr>
+            <a:xfrm>
+              <a:off x="7059297" y="4037527"/>
+              <a:ext cx="379927" cy="379927"/>
+            </a:xfrm>
+            <a:prstGeom prst="ellipse">
+              <a:avLst/>
+            </a:prstGeom>
+          </p:spPr>
+          <p:style>
+            <a:lnRef idx="2">
+              <a:schemeClr val="accent1">
+                <a:shade val="50000"/>
+              </a:schemeClr>
+            </a:lnRef>
+            <a:fillRef idx="1">
+              <a:schemeClr val="accent1"/>
+            </a:fillRef>
+            <a:effectRef idx="0">
+              <a:schemeClr val="accent1"/>
+            </a:effectRef>
+            <a:fontRef idx="minor">
+              <a:schemeClr val="lt1"/>
+            </a:fontRef>
+          </p:style>
+          <p:txBody>
+            <a:bodyPr rtlCol="0" anchor="ctr"/>
+            <a:lstStyle/>
+            <a:p>
+              <a:pPr algn="ctr"/>
+              <a:endParaRPr lang="zh-CN" altLang="en-US"/>
+            </a:p>
+          </p:txBody>
+        </p:sp>
+        <p:sp>
+          <p:nvSpPr>
+            <p:cNvPr id="50" name="文本框 49"/>
+            <p:cNvSpPr txBox="1"/>
+            <p:nvPr/>
+          </p:nvSpPr>
+          <p:spPr>
+            <a:xfrm rot="5400000">
+              <a:off x="7147848" y="3353940"/>
+              <a:ext cx="453970" cy="584775"/>
+            </a:xfrm>
+            <a:prstGeom prst="rect">
+              <a:avLst/>
+            </a:prstGeom>
+            <a:noFill/>
+          </p:spPr>
+          <p:txBody>
+            <a:bodyPr vert="horz" wrap="none" rtlCol="0" anchor="t">
+              <a:spAutoFit/>
+            </a:bodyPr>
+            <a:lstStyle/>
+            <a:p>
+              <a:pPr algn="ctr"/>
+              <a:r>
+                <a:rPr lang="en-US" altLang="zh-CN" sz="3200" dirty="0" smtClean="0"/>
+                <a:t>...</a:t>
+              </a:r>
+              <a:endParaRPr lang="zh-CN" altLang="en-US" sz="3200" dirty="0"/>
+            </a:p>
+          </p:txBody>
+        </p:sp>
+        <p:sp>
+          <p:nvSpPr>
+            <p:cNvPr id="51" name="文本框 50"/>
+            <p:cNvSpPr txBox="1"/>
+            <p:nvPr/>
+          </p:nvSpPr>
+          <p:spPr>
+            <a:xfrm>
+              <a:off x="7109667" y="2297488"/>
+              <a:ext cx="306494" cy="253916"/>
+            </a:xfrm>
+            <a:prstGeom prst="rect">
+              <a:avLst/>
+            </a:prstGeom>
+            <a:noFill/>
+          </p:spPr>
+          <p:txBody>
+            <a:bodyPr vert="horz" wrap="none" rtlCol="0">
+              <a:spAutoFit/>
+            </a:bodyPr>
+            <a:lstStyle/>
+            <a:p>
+              <a:r>
+                <a:rPr lang="en-US" altLang="zh-CN" sz="1050" dirty="0">
+                  <a:solidFill>
+                    <a:schemeClr val="bg1"/>
+                  </a:solidFill>
+                </a:rPr>
+                <a:t>h</a:t>
+              </a:r>
+              <a:r>
+                <a:rPr lang="en-US" altLang="zh-CN" sz="1050" baseline="-25000" dirty="0" smtClean="0">
+                  <a:solidFill>
+                    <a:schemeClr val="bg1"/>
+                  </a:solidFill>
+                </a:rPr>
+                <a:t>1</a:t>
+              </a:r>
+              <a:endParaRPr lang="zh-CN" altLang="en-US" sz="1050" baseline="-25000" dirty="0">
+                <a:solidFill>
+                  <a:schemeClr val="bg1"/>
+                </a:solidFill>
+              </a:endParaRPr>
+            </a:p>
+          </p:txBody>
+        </p:sp>
+        <p:sp>
+          <p:nvSpPr>
+            <p:cNvPr id="52" name="文本框 51"/>
+            <p:cNvSpPr txBox="1"/>
+            <p:nvPr/>
+          </p:nvSpPr>
+          <p:spPr>
+            <a:xfrm>
+              <a:off x="7108518" y="2915674"/>
+              <a:ext cx="306494" cy="253916"/>
+            </a:xfrm>
+            <a:prstGeom prst="rect">
+              <a:avLst/>
+            </a:prstGeom>
+            <a:noFill/>
+          </p:spPr>
+          <p:txBody>
+            <a:bodyPr vert="horz" wrap="none" rtlCol="0">
+              <a:spAutoFit/>
+            </a:bodyPr>
+            <a:lstStyle/>
+            <a:p>
+              <a:r>
+                <a:rPr lang="en-US" altLang="zh-CN" sz="1050" dirty="0" smtClean="0">
+                  <a:solidFill>
+                    <a:schemeClr val="bg1"/>
+                  </a:solidFill>
+                </a:rPr>
+                <a:t>h</a:t>
+              </a:r>
+              <a:r>
+                <a:rPr lang="en-US" altLang="zh-CN" sz="1050" baseline="-25000" dirty="0" smtClean="0">
+                  <a:solidFill>
+                    <a:schemeClr val="bg1"/>
+                  </a:solidFill>
+                </a:rPr>
+                <a:t>2</a:t>
+              </a:r>
+              <a:endParaRPr lang="zh-CN" altLang="en-US" sz="1050" baseline="-25000" dirty="0">
+                <a:solidFill>
+                  <a:schemeClr val="bg1"/>
+                </a:solidFill>
+              </a:endParaRPr>
+            </a:p>
+          </p:txBody>
+        </p:sp>
+        <p:sp>
+          <p:nvSpPr>
+            <p:cNvPr id="53" name="文本框 52"/>
+            <p:cNvSpPr txBox="1"/>
+            <p:nvPr/>
+          </p:nvSpPr>
+          <p:spPr>
+            <a:xfrm>
+              <a:off x="7103226" y="4100532"/>
+              <a:ext cx="279244" cy="253916"/>
+            </a:xfrm>
+            <a:prstGeom prst="rect">
+              <a:avLst/>
+            </a:prstGeom>
+            <a:noFill/>
+          </p:spPr>
+          <p:txBody>
+            <a:bodyPr vert="horz" wrap="none" rtlCol="0">
+              <a:spAutoFit/>
+            </a:bodyPr>
+            <a:lstStyle/>
+            <a:p>
+              <a:r>
+                <a:rPr lang="en-US" altLang="zh-CN" sz="1050" dirty="0" smtClean="0">
+                  <a:solidFill>
+                    <a:schemeClr val="bg1"/>
+                  </a:solidFill>
+                </a:rPr>
+                <a:t>h</a:t>
+              </a:r>
+              <a:r>
+                <a:rPr lang="en-US" altLang="zh-CN" sz="1050" baseline="-25000" dirty="0">
+                  <a:solidFill>
+                    <a:schemeClr val="bg1"/>
+                  </a:solidFill>
+                </a:rPr>
+                <a:t>j</a:t>
+              </a:r>
+              <a:endParaRPr lang="zh-CN" altLang="en-US" sz="1050" baseline="-25000" dirty="0">
+                <a:solidFill>
+                  <a:schemeClr val="bg1"/>
+                </a:solidFill>
+              </a:endParaRPr>
+            </a:p>
+          </p:txBody>
+        </p:sp>
+        <p:sp>
+          <p:nvSpPr>
+            <p:cNvPr id="54" name="文本框 53"/>
+            <p:cNvSpPr txBox="1"/>
+            <p:nvPr/>
+          </p:nvSpPr>
+          <p:spPr>
+            <a:xfrm rot="5400000">
+              <a:off x="7997289" y="3049141"/>
+              <a:ext cx="453970" cy="584775"/>
+            </a:xfrm>
+            <a:prstGeom prst="rect">
+              <a:avLst/>
+            </a:prstGeom>
+            <a:noFill/>
+          </p:spPr>
+          <p:txBody>
+            <a:bodyPr vert="horz" wrap="none" rtlCol="0" anchor="t">
+              <a:spAutoFit/>
+            </a:bodyPr>
+            <a:lstStyle/>
+            <a:p>
+              <a:pPr algn="ctr"/>
+              <a:r>
+                <a:rPr lang="en-US" altLang="zh-CN" sz="3200" dirty="0" smtClean="0"/>
+                <a:t>...</a:t>
+              </a:r>
+              <a:endParaRPr lang="zh-CN" altLang="en-US" sz="3200" dirty="0"/>
+            </a:p>
+          </p:txBody>
+        </p:sp>
+        <p:cxnSp>
+          <p:nvCxnSpPr>
+            <p:cNvPr id="55" name="直接箭头连接符 54"/>
+            <p:cNvCxnSpPr>
+              <a:stCxn id="22" idx="6"/>
+              <a:endCxn id="47" idx="2"/>
+            </p:cNvCxnSpPr>
+            <p:nvPr/>
+          </p:nvCxnSpPr>
+          <p:spPr>
+            <a:xfrm>
+              <a:off x="6465195" y="2424448"/>
+              <a:ext cx="600543" cy="0"/>
+            </a:xfrm>
+            <a:prstGeom prst="straightConnector1">
+              <a:avLst/>
+            </a:prstGeom>
+            <a:ln>
+              <a:tailEnd type="triangle"/>
+            </a:ln>
+          </p:spPr>
+          <p:style>
+            <a:lnRef idx="1">
+              <a:schemeClr val="accent1"/>
+            </a:lnRef>
+            <a:fillRef idx="0">
+              <a:schemeClr val="accent1"/>
+            </a:fillRef>
+            <a:effectRef idx="0">
+              <a:schemeClr val="accent1"/>
+            </a:effectRef>
+            <a:fontRef idx="minor">
+              <a:schemeClr val="tx1"/>
+            </a:fontRef>
+          </p:style>
+        </p:cxnSp>
+        <p:cxnSp>
+          <p:nvCxnSpPr>
+            <p:cNvPr id="56" name="直接箭头连接符 55"/>
+            <p:cNvCxnSpPr>
+              <a:stCxn id="22" idx="6"/>
+              <a:endCxn id="48" idx="2"/>
+            </p:cNvCxnSpPr>
+            <p:nvPr/>
+          </p:nvCxnSpPr>
+          <p:spPr>
+            <a:xfrm>
+              <a:off x="6465195" y="2424448"/>
+              <a:ext cx="594103" cy="618185"/>
+            </a:xfrm>
+            <a:prstGeom prst="straightConnector1">
+              <a:avLst/>
+            </a:prstGeom>
+            <a:ln>
+              <a:tailEnd type="triangle"/>
+            </a:ln>
+          </p:spPr>
+          <p:style>
+            <a:lnRef idx="1">
+              <a:schemeClr val="accent1"/>
+            </a:lnRef>
+            <a:fillRef idx="0">
+              <a:schemeClr val="accent1"/>
+            </a:fillRef>
+            <a:effectRef idx="0">
+              <a:schemeClr val="accent1"/>
+            </a:effectRef>
+            <a:fontRef idx="minor">
+              <a:schemeClr val="tx1"/>
+            </a:fontRef>
+          </p:style>
+        </p:cxnSp>
+        <p:cxnSp>
+          <p:nvCxnSpPr>
+            <p:cNvPr id="57" name="直接箭头连接符 56"/>
+            <p:cNvCxnSpPr>
+              <a:stCxn id="22" idx="6"/>
+              <a:endCxn id="49" idx="2"/>
+            </p:cNvCxnSpPr>
+            <p:nvPr/>
+          </p:nvCxnSpPr>
+          <p:spPr>
+            <a:xfrm>
+              <a:off x="6465195" y="2424448"/>
+              <a:ext cx="594102" cy="1803043"/>
+            </a:xfrm>
+            <a:prstGeom prst="straightConnector1">
+              <a:avLst/>
+            </a:prstGeom>
+            <a:ln>
+              <a:tailEnd type="triangle"/>
+            </a:ln>
+          </p:spPr>
+          <p:style>
+            <a:lnRef idx="1">
+              <a:schemeClr val="accent1"/>
+            </a:lnRef>
+            <a:fillRef idx="0">
+              <a:schemeClr val="accent1"/>
+            </a:fillRef>
+            <a:effectRef idx="0">
+              <a:schemeClr val="accent1"/>
+            </a:effectRef>
+            <a:fontRef idx="minor">
+              <a:schemeClr val="tx1"/>
+            </a:fontRef>
+          </p:style>
+        </p:cxnSp>
+        <p:cxnSp>
+          <p:nvCxnSpPr>
+            <p:cNvPr id="58" name="直接箭头连接符 57"/>
+            <p:cNvCxnSpPr>
+              <a:stCxn id="24" idx="6"/>
+              <a:endCxn id="47" idx="2"/>
+            </p:cNvCxnSpPr>
+            <p:nvPr/>
+          </p:nvCxnSpPr>
+          <p:spPr>
+            <a:xfrm flipV="1">
+              <a:off x="6458755" y="2424448"/>
+              <a:ext cx="606983" cy="618185"/>
+            </a:xfrm>
+            <a:prstGeom prst="straightConnector1">
+              <a:avLst/>
+            </a:prstGeom>
+            <a:ln>
+              <a:tailEnd type="triangle"/>
+            </a:ln>
+          </p:spPr>
+          <p:style>
+            <a:lnRef idx="1">
+              <a:schemeClr val="accent1"/>
+            </a:lnRef>
+            <a:fillRef idx="0">
+              <a:schemeClr val="accent1"/>
+            </a:fillRef>
+            <a:effectRef idx="0">
+              <a:schemeClr val="accent1"/>
+            </a:effectRef>
+            <a:fontRef idx="minor">
+              <a:schemeClr val="tx1"/>
+            </a:fontRef>
+          </p:style>
+        </p:cxnSp>
+        <p:cxnSp>
+          <p:nvCxnSpPr>
+            <p:cNvPr id="60" name="直接箭头连接符 59"/>
+            <p:cNvCxnSpPr>
+              <a:stCxn id="24" idx="6"/>
+              <a:endCxn id="48" idx="2"/>
+            </p:cNvCxnSpPr>
+            <p:nvPr/>
+          </p:nvCxnSpPr>
+          <p:spPr>
+            <a:xfrm>
+              <a:off x="6458755" y="3042633"/>
+              <a:ext cx="600543" cy="0"/>
+            </a:xfrm>
+            <a:prstGeom prst="straightConnector1">
+              <a:avLst/>
+            </a:prstGeom>
+            <a:ln>
+              <a:tailEnd type="triangle"/>
+            </a:ln>
+          </p:spPr>
+          <p:style>
+            <a:lnRef idx="1">
+              <a:schemeClr val="accent1"/>
+            </a:lnRef>
+            <a:fillRef idx="0">
+              <a:schemeClr val="accent1"/>
+            </a:fillRef>
+            <a:effectRef idx="0">
+              <a:schemeClr val="accent1"/>
+            </a:effectRef>
+            <a:fontRef idx="minor">
+              <a:schemeClr val="tx1"/>
+            </a:fontRef>
+          </p:style>
+        </p:cxnSp>
+        <p:cxnSp>
+          <p:nvCxnSpPr>
+            <p:cNvPr id="63" name="直接箭头连接符 62"/>
+            <p:cNvCxnSpPr>
+              <a:stCxn id="24" idx="6"/>
+              <a:endCxn id="49" idx="2"/>
+            </p:cNvCxnSpPr>
+            <p:nvPr/>
+          </p:nvCxnSpPr>
+          <p:spPr>
+            <a:xfrm>
+              <a:off x="6458755" y="3042633"/>
+              <a:ext cx="600542" cy="1184858"/>
+            </a:xfrm>
+            <a:prstGeom prst="straightConnector1">
+              <a:avLst/>
+            </a:prstGeom>
+            <a:ln>
+              <a:tailEnd type="triangle"/>
+            </a:ln>
+          </p:spPr>
+          <p:style>
+            <a:lnRef idx="1">
+              <a:schemeClr val="accent1"/>
+            </a:lnRef>
+            <a:fillRef idx="0">
+              <a:schemeClr val="accent1"/>
+            </a:fillRef>
+            <a:effectRef idx="0">
+              <a:schemeClr val="accent1"/>
+            </a:effectRef>
+            <a:fontRef idx="minor">
+              <a:schemeClr val="tx1"/>
+            </a:fontRef>
+          </p:style>
+        </p:cxnSp>
+        <p:cxnSp>
+          <p:nvCxnSpPr>
+            <p:cNvPr id="66" name="直接箭头连接符 65"/>
+            <p:cNvCxnSpPr>
+              <a:stCxn id="26" idx="6"/>
+              <a:endCxn id="47" idx="2"/>
+            </p:cNvCxnSpPr>
+            <p:nvPr/>
+          </p:nvCxnSpPr>
+          <p:spPr>
+            <a:xfrm flipV="1">
+              <a:off x="6458754" y="2424448"/>
+              <a:ext cx="606984" cy="1803043"/>
+            </a:xfrm>
+            <a:prstGeom prst="straightConnector1">
+              <a:avLst/>
+            </a:prstGeom>
+            <a:ln>
+              <a:tailEnd type="triangle"/>
+            </a:ln>
+          </p:spPr>
+          <p:style>
+            <a:lnRef idx="1">
+              <a:schemeClr val="accent1"/>
+            </a:lnRef>
+            <a:fillRef idx="0">
+              <a:schemeClr val="accent1"/>
+            </a:fillRef>
+            <a:effectRef idx="0">
+              <a:schemeClr val="accent1"/>
+            </a:effectRef>
+            <a:fontRef idx="minor">
+              <a:schemeClr val="tx1"/>
+            </a:fontRef>
+          </p:style>
+        </p:cxnSp>
+        <p:cxnSp>
+          <p:nvCxnSpPr>
+            <p:cNvPr id="69" name="直接箭头连接符 68"/>
+            <p:cNvCxnSpPr>
+              <a:stCxn id="26" idx="6"/>
+              <a:endCxn id="48" idx="2"/>
+            </p:cNvCxnSpPr>
+            <p:nvPr/>
+          </p:nvCxnSpPr>
+          <p:spPr>
+            <a:xfrm flipV="1">
+              <a:off x="6458754" y="3042633"/>
+              <a:ext cx="600544" cy="1184858"/>
+            </a:xfrm>
+            <a:prstGeom prst="straightConnector1">
+              <a:avLst/>
+            </a:prstGeom>
+            <a:ln>
+              <a:tailEnd type="triangle"/>
+            </a:ln>
+          </p:spPr>
+          <p:style>
+            <a:lnRef idx="1">
+              <a:schemeClr val="accent1"/>
+            </a:lnRef>
+            <a:fillRef idx="0">
+              <a:schemeClr val="accent1"/>
+            </a:fillRef>
+            <a:effectRef idx="0">
+              <a:schemeClr val="accent1"/>
+            </a:effectRef>
+            <a:fontRef idx="minor">
+              <a:schemeClr val="tx1"/>
+            </a:fontRef>
+          </p:style>
+        </p:cxnSp>
+        <p:cxnSp>
+          <p:nvCxnSpPr>
+            <p:cNvPr id="72" name="直接箭头连接符 71"/>
+            <p:cNvCxnSpPr>
+              <a:stCxn id="26" idx="6"/>
+              <a:endCxn id="49" idx="2"/>
+            </p:cNvCxnSpPr>
+            <p:nvPr/>
+          </p:nvCxnSpPr>
+          <p:spPr>
+            <a:xfrm>
+              <a:off x="6458754" y="4227491"/>
+              <a:ext cx="600543" cy="0"/>
+            </a:xfrm>
+            <a:prstGeom prst="straightConnector1">
+              <a:avLst/>
+            </a:prstGeom>
+            <a:ln>
+              <a:tailEnd type="triangle"/>
+            </a:ln>
+          </p:spPr>
+          <p:style>
+            <a:lnRef idx="1">
+              <a:schemeClr val="accent1"/>
+            </a:lnRef>
+            <a:fillRef idx="0">
+              <a:schemeClr val="accent1"/>
+            </a:fillRef>
+            <a:effectRef idx="0">
+              <a:schemeClr val="accent1"/>
+            </a:effectRef>
+            <a:fontRef idx="minor">
+              <a:schemeClr val="tx1"/>
+            </a:fontRef>
+          </p:style>
+        </p:cxnSp>
+        <p:cxnSp>
+          <p:nvCxnSpPr>
+            <p:cNvPr id="75" name="直接箭头连接符 74"/>
+            <p:cNvCxnSpPr>
+              <a:endCxn id="36" idx="2"/>
+            </p:cNvCxnSpPr>
+            <p:nvPr/>
+          </p:nvCxnSpPr>
+          <p:spPr>
+            <a:xfrm>
+              <a:off x="8120130" y="2619304"/>
+              <a:ext cx="624899" cy="173577"/>
+            </a:xfrm>
+            <a:prstGeom prst="straightConnector1">
+              <a:avLst/>
+            </a:prstGeom>
+            <a:ln>
+              <a:tailEnd type="triangle"/>
+            </a:ln>
+          </p:spPr>
+          <p:style>
+            <a:lnRef idx="1">
+              <a:schemeClr val="accent1"/>
+            </a:lnRef>
+            <a:fillRef idx="0">
+              <a:schemeClr val="accent1"/>
+            </a:fillRef>
+            <a:effectRef idx="0">
+              <a:schemeClr val="accent1"/>
+            </a:effectRef>
+            <a:fontRef idx="minor">
+              <a:schemeClr val="tx1"/>
+            </a:fontRef>
+          </p:style>
+        </p:cxnSp>
+        <p:cxnSp>
+          <p:nvCxnSpPr>
+            <p:cNvPr id="78" name="直接箭头连接符 77"/>
+            <p:cNvCxnSpPr>
+              <a:endCxn id="36" idx="2"/>
+            </p:cNvCxnSpPr>
+            <p:nvPr/>
+          </p:nvCxnSpPr>
+          <p:spPr>
+            <a:xfrm flipV="1">
+              <a:off x="8113689" y="2792881"/>
+              <a:ext cx="631340" cy="228967"/>
+            </a:xfrm>
+            <a:prstGeom prst="straightConnector1">
+              <a:avLst/>
+            </a:prstGeom>
+            <a:ln>
+              <a:tailEnd type="triangle"/>
+            </a:ln>
+          </p:spPr>
+          <p:style>
+            <a:lnRef idx="1">
+              <a:schemeClr val="accent1"/>
+            </a:lnRef>
+            <a:fillRef idx="0">
+              <a:schemeClr val="accent1"/>
+            </a:fillRef>
+            <a:effectRef idx="0">
+              <a:schemeClr val="accent1"/>
+            </a:effectRef>
+            <a:fontRef idx="minor">
+              <a:schemeClr val="tx1"/>
+            </a:fontRef>
+          </p:style>
+        </p:cxnSp>
+        <p:cxnSp>
+          <p:nvCxnSpPr>
+            <p:cNvPr id="81" name="直接箭头连接符 80"/>
+            <p:cNvCxnSpPr>
+              <a:endCxn id="36" idx="2"/>
+            </p:cNvCxnSpPr>
+            <p:nvPr/>
+          </p:nvCxnSpPr>
+          <p:spPr>
+            <a:xfrm flipV="1">
+              <a:off x="8107248" y="2792881"/>
+              <a:ext cx="637781" cy="626461"/>
+            </a:xfrm>
+            <a:prstGeom prst="straightConnector1">
+              <a:avLst/>
+            </a:prstGeom>
+            <a:ln>
+              <a:tailEnd type="triangle"/>
+            </a:ln>
+          </p:spPr>
+          <p:style>
+            <a:lnRef idx="1">
+              <a:schemeClr val="accent1"/>
+            </a:lnRef>
+            <a:fillRef idx="0">
+              <a:schemeClr val="accent1"/>
+            </a:fillRef>
+            <a:effectRef idx="0">
+              <a:schemeClr val="accent1"/>
+            </a:effectRef>
+            <a:fontRef idx="minor">
+              <a:schemeClr val="tx1"/>
+            </a:fontRef>
+          </p:style>
+        </p:cxnSp>
+        <p:cxnSp>
+          <p:nvCxnSpPr>
+            <p:cNvPr id="84" name="直接箭头连接符 83"/>
+            <p:cNvCxnSpPr>
+              <a:endCxn id="37" idx="2"/>
+            </p:cNvCxnSpPr>
+            <p:nvPr/>
+          </p:nvCxnSpPr>
+          <p:spPr>
+            <a:xfrm>
+              <a:off x="8120130" y="3232596"/>
+              <a:ext cx="624898" cy="745143"/>
+            </a:xfrm>
+            <a:prstGeom prst="straightConnector1">
+              <a:avLst/>
+            </a:prstGeom>
+            <a:ln>
+              <a:tailEnd type="triangle"/>
+            </a:ln>
+          </p:spPr>
+          <p:style>
+            <a:lnRef idx="1">
+              <a:schemeClr val="accent1"/>
+            </a:lnRef>
+            <a:fillRef idx="0">
+              <a:schemeClr val="accent1"/>
+            </a:fillRef>
+            <a:effectRef idx="0">
+              <a:schemeClr val="accent1"/>
+            </a:effectRef>
+            <a:fontRef idx="minor">
+              <a:schemeClr val="tx1"/>
+            </a:fontRef>
+          </p:style>
+        </p:cxnSp>
+        <p:cxnSp>
+          <p:nvCxnSpPr>
+            <p:cNvPr id="87" name="直接箭头连接符 86"/>
+            <p:cNvCxnSpPr>
+              <a:endCxn id="37" idx="2"/>
+            </p:cNvCxnSpPr>
+            <p:nvPr/>
+          </p:nvCxnSpPr>
+          <p:spPr>
+            <a:xfrm>
+              <a:off x="8084697" y="3696237"/>
+              <a:ext cx="660331" cy="281502"/>
+            </a:xfrm>
+            <a:prstGeom prst="straightConnector1">
+              <a:avLst/>
+            </a:prstGeom>
+            <a:ln>
+              <a:tailEnd type="triangle"/>
+            </a:ln>
+          </p:spPr>
+          <p:style>
+            <a:lnRef idx="1">
+              <a:schemeClr val="accent1"/>
+            </a:lnRef>
+            <a:fillRef idx="0">
+              <a:schemeClr val="accent1"/>
+            </a:fillRef>
+            <a:effectRef idx="0">
+              <a:schemeClr val="accent1"/>
+            </a:effectRef>
+            <a:fontRef idx="minor">
+              <a:schemeClr val="tx1"/>
+            </a:fontRef>
+          </p:style>
+        </p:cxnSp>
+        <p:cxnSp>
+          <p:nvCxnSpPr>
+            <p:cNvPr id="90" name="直接箭头连接符 89"/>
+            <p:cNvCxnSpPr>
+              <a:endCxn id="37" idx="2"/>
+            </p:cNvCxnSpPr>
+            <p:nvPr/>
+          </p:nvCxnSpPr>
+          <p:spPr>
+            <a:xfrm flipV="1">
+              <a:off x="8035477" y="3977739"/>
+              <a:ext cx="709551" cy="122793"/>
+            </a:xfrm>
+            <a:prstGeom prst="straightConnector1">
+              <a:avLst/>
+            </a:prstGeom>
+            <a:ln>
+              <a:tailEnd type="triangle"/>
+            </a:ln>
+          </p:spPr>
+          <p:style>
+            <a:lnRef idx="1">
+              <a:schemeClr val="accent1"/>
+            </a:lnRef>
+            <a:fillRef idx="0">
+              <a:schemeClr val="accent1"/>
+            </a:fillRef>
+            <a:effectRef idx="0">
+              <a:schemeClr val="accent1"/>
+            </a:effectRef>
+            <a:fontRef idx="minor">
+              <a:schemeClr val="tx1"/>
+            </a:fontRef>
+          </p:style>
+        </p:cxnSp>
+        <p:cxnSp>
+          <p:nvCxnSpPr>
+            <p:cNvPr id="94" name="直接箭头连接符 93"/>
+            <p:cNvCxnSpPr>
+              <a:stCxn id="51" idx="3"/>
+            </p:cNvCxnSpPr>
+            <p:nvPr/>
+          </p:nvCxnSpPr>
+          <p:spPr>
+            <a:xfrm>
+              <a:off x="7416161" y="2424446"/>
+              <a:ext cx="562301" cy="730495"/>
+            </a:xfrm>
+            <a:prstGeom prst="straightConnector1">
+              <a:avLst/>
+            </a:prstGeom>
+            <a:ln>
+              <a:tailEnd type="triangle"/>
+            </a:ln>
+          </p:spPr>
+          <p:style>
+            <a:lnRef idx="1">
+              <a:schemeClr val="accent1"/>
+            </a:lnRef>
+            <a:fillRef idx="0">
+              <a:schemeClr val="accent1"/>
+            </a:fillRef>
+            <a:effectRef idx="0">
+              <a:schemeClr val="accent1"/>
+            </a:effectRef>
+            <a:fontRef idx="minor">
+              <a:schemeClr val="tx1"/>
+            </a:fontRef>
+          </p:style>
+        </p:cxnSp>
+        <p:cxnSp>
+          <p:nvCxnSpPr>
+            <p:cNvPr id="98" name="直接箭头连接符 97"/>
+            <p:cNvCxnSpPr>
+              <a:stCxn id="52" idx="3"/>
+              <a:endCxn id="54" idx="2"/>
+            </p:cNvCxnSpPr>
+            <p:nvPr/>
+          </p:nvCxnSpPr>
+          <p:spPr>
+            <a:xfrm>
+              <a:off x="7415012" y="3042632"/>
+              <a:ext cx="516875" cy="298897"/>
+            </a:xfrm>
+            <a:prstGeom prst="straightConnector1">
+              <a:avLst/>
+            </a:prstGeom>
+            <a:ln>
+              <a:tailEnd type="triangle"/>
+            </a:ln>
+          </p:spPr>
+          <p:style>
+            <a:lnRef idx="1">
+              <a:schemeClr val="accent1"/>
+            </a:lnRef>
+            <a:fillRef idx="0">
+              <a:schemeClr val="accent1"/>
+            </a:fillRef>
+            <a:effectRef idx="0">
+              <a:schemeClr val="accent1"/>
+            </a:effectRef>
+            <a:fontRef idx="minor">
+              <a:schemeClr val="tx1"/>
+            </a:fontRef>
+          </p:style>
+        </p:cxnSp>
+        <p:cxnSp>
+          <p:nvCxnSpPr>
+            <p:cNvPr id="101" name="直接箭头连接符 100"/>
+            <p:cNvCxnSpPr>
+              <a:stCxn id="49" idx="6"/>
+            </p:cNvCxnSpPr>
+            <p:nvPr/>
+          </p:nvCxnSpPr>
+          <p:spPr>
+            <a:xfrm flipV="1">
+              <a:off x="7439224" y="3505743"/>
+              <a:ext cx="515810" cy="721748"/>
             </a:xfrm>
             <a:prstGeom prst="straightConnector1">
               <a:avLst/>
